--- a/assets/figures-editable/c3-c4/c4-e36.pptx
+++ b/assets/figures-editable/c3-c4/c4-e36.pptx
@@ -3104,8 +3104,8 @@
         </p:nvSpPr>
         <p:spPr>
           <a:xfrm>
-            <a:off x="274320" y="137160"/>
-            <a:ext cx="11612880" cy="365760"/>
+            <a:off x="274320" y="118872"/>
+            <a:ext cx="11612880" cy="340105"/>
           </a:xfrm>
           <a:prstGeom prst="rect">
             <a:avLst/>
@@ -3114,7 +3114,7 @@
           <a:effectLst/>
         </p:spPr>
         <p:txBody>
-          <a:bodyPr wrap="square" lIns="27432" rIns="27432" tIns="18288" bIns="18288" anchor="ctr">
+          <a:bodyPr wrap="none" lIns="18288" rIns="18288" tIns="18288" bIns="18288" anchor="t">
             <a:spAutoFit/>
           </a:bodyPr>
           <a:lstStyle/>
@@ -3125,7 +3125,7 @@
               </a:spcAft>
             </a:pPr>
             <a:r>
-              <a:rPr sz="2100" b="0" i="0">
+              <a:rPr sz="1900" b="1" i="0">
                 <a:solidFill>
                   <a:srgbClr val="8EDBD4"/>
                 </a:solidFill>
@@ -3138,46 +3138,14 @@
       </p:sp>
       <p:sp>
         <p:nvSpPr>
-          <p:cNvPr id="3" name="C4-E36 rect 1" descr="sci-ppt:o001"/>
-          <p:cNvSpPr/>
+          <p:cNvPr id="3" name="C4-E36 text 1" descr="sci-ppt:o001"/>
+          <p:cNvSpPr txBox="1"/>
           <p:nvPr/>
         </p:nvSpPr>
         <p:spPr>
           <a:xfrm>
-            <a:off x="594360" y="1417320"/>
-            <a:ext cx="3200400" cy="1325880"/>
-          </a:xfrm>
-          <a:prstGeom prst="rect">
-            <a:avLst/>
-          </a:prstGeom>
-          <a:solidFill>
-            <a:srgbClr val="213E4B"/>
-          </a:solidFill>
-          <a:ln w="19050">
-            <a:solidFill>
-              <a:srgbClr val="B4C7D2"/>
-            </a:solidFill>
-          </a:ln>
-          <a:effectLst/>
-        </p:spPr>
-        <p:txBody>
-          <a:bodyPr rtlCol="0" anchor="ctr"/>
-          <a:lstStyle/>
-          <a:p>
-            <a:pPr algn="ctr"/>
-          </a:p>
-        </p:txBody>
-      </p:sp>
-      <p:sp>
-        <p:nvSpPr>
-          <p:cNvPr id="4" name="C4-E36 text 2" descr="sci-ppt:o002"/>
-          <p:cNvSpPr txBox="1"/>
-          <p:nvPr/>
-        </p:nvSpPr>
-        <p:spPr>
-          <a:xfrm>
-            <a:off x="758952" y="1627632"/>
-            <a:ext cx="2871216" cy="914400"/>
+            <a:off x="457200" y="914400"/>
+            <a:ext cx="11247120" cy="254889"/>
           </a:xfrm>
           <a:prstGeom prst="rect">
             <a:avLst/>
@@ -3186,7 +3154,7 @@
           <a:effectLst/>
         </p:spPr>
         <p:txBody>
-          <a:bodyPr wrap="square" lIns="27432" rIns="27432" tIns="18288" bIns="18288" anchor="ctr">
+          <a:bodyPr wrap="none" lIns="18288" rIns="18288" tIns="18288" bIns="18288" anchor="t">
             <a:spAutoFit/>
           </a:bodyPr>
           <a:lstStyle/>
@@ -3197,61 +3165,37 @@
               </a:spcAft>
             </a:pPr>
             <a:r>
-              <a:rPr sz="1800" b="0" i="0">
+              <a:rPr sz="1350" b="1" i="0">
                 <a:solidFill>
-                  <a:srgbClr val="E7F0F3"/>
+                  <a:srgbClr val="8EDBD4"/>
                 </a:solidFill>
                 <a:latin typeface="Arial"/>
               </a:rPr>
-              <a:t>Incoming finite budgets</a:t>
-            </a:r>
-          </a:p>
-        </p:txBody>
-      </p:sp>
-      <p:cxnSp>
-        <p:nvCxnSpPr>
-          <p:cNvPr id="5" name="C4-E36 arrow 3" descr="sci-ppt:o003"/>
-          <p:cNvCxnSpPr/>
+              <a:t>Defence 1: global screens</a:t>
+            </a:r>
+          </a:p>
+        </p:txBody>
+      </p:sp>
+      <p:sp>
+        <p:nvSpPr>
+          <p:cNvPr id="4" name="C4-E36 round_rect 2" descr="sci-ppt:o002"/>
+          <p:cNvSpPr/>
           <p:nvPr/>
-        </p:nvCxnSpPr>
+        </p:nvSpPr>
         <p:spPr>
           <a:xfrm>
-            <a:off x="3794760" y="2057400"/>
-            <a:ext cx="640080" cy="0"/>
+            <a:off x="457200" y="1371600"/>
+            <a:ext cx="5486400" cy="2103120"/>
           </a:xfrm>
-          <a:prstGeom prst="line">
-            <a:avLst/>
-          </a:prstGeom>
-          <a:ln w="25400">
-            <a:solidFill>
-              <a:srgbClr val="8EDBD4"/>
-            </a:solidFill>
-            <a:headEnd type="none" w="med" len="med"/>
-            <a:tailEnd type="triangle" w="med" len="med"/>
-          </a:ln>
-          <a:effectLst/>
-        </p:spPr>
-      </p:cxnSp>
-      <p:sp>
-        <p:nvSpPr>
-          <p:cNvPr id="6" name="C4-E36 rect 4" descr="sci-ppt:o004"/>
-          <p:cNvSpPr/>
-          <p:nvPr/>
-        </p:nvSpPr>
-        <p:spPr>
-          <a:xfrm>
-            <a:off x="4480560" y="1417320"/>
-            <a:ext cx="3200400" cy="1325880"/>
-          </a:xfrm>
-          <a:prstGeom prst="rect">
+          <a:prstGeom prst="roundRect">
             <a:avLst/>
           </a:prstGeom>
           <a:solidFill>
             <a:srgbClr val="213E4B"/>
           </a:solidFill>
-          <a:ln w="19050">
+          <a:ln w="20320">
             <a:solidFill>
-              <a:srgbClr val="B4C7D2"/>
+              <a:srgbClr val="F2B880"/>
             </a:solidFill>
           </a:ln>
           <a:effectLst/>
@@ -3266,14 +3210,14 @@
       </p:sp>
       <p:sp>
         <p:nvSpPr>
-          <p:cNvPr id="7" name="C4-E36 text 5" descr="sci-ppt:o005"/>
+          <p:cNvPr id="5" name="C4-E36 text 3" descr="sci-ppt:o003"/>
           <p:cNvSpPr txBox="1"/>
           <p:nvPr/>
         </p:nvSpPr>
         <p:spPr>
           <a:xfrm>
-            <a:off x="4645152" y="1627632"/>
-            <a:ext cx="2871216" cy="914400"/>
+            <a:off x="566928" y="1426464"/>
+            <a:ext cx="5266944" cy="254889"/>
           </a:xfrm>
           <a:prstGeom prst="rect">
             <a:avLst/>
@@ -3282,7 +3226,7 @@
           <a:effectLst/>
         </p:spPr>
         <p:txBody>
-          <a:bodyPr wrap="square" lIns="27432" rIns="27432" tIns="18288" bIns="18288" anchor="ctr">
+          <a:bodyPr wrap="none" lIns="18288" rIns="18288" tIns="18288" bIns="18288" anchor="t">
             <a:spAutoFit/>
           </a:bodyPr>
           <a:lstStyle/>
@@ -3293,83 +3237,27 @@
               </a:spcAft>
             </a:pPr>
             <a:r>
-              <a:rPr sz="1800" b="0" i="0">
+              <a:rPr sz="1350" b="1" i="0">
                 <a:solidFill>
-                  <a:srgbClr val="E7F0F3"/>
+                  <a:srgbClr val="F2B880"/>
                 </a:solidFill>
                 <a:latin typeface="Arial"/>
               </a:rPr>
-              <a:t>Transmitted E_solid, I_net</a:t>
-            </a:r>
-          </a:p>
-        </p:txBody>
-      </p:sp>
-      <p:cxnSp>
-        <p:nvCxnSpPr>
-          <p:cNvPr id="8" name="C4-E36 arrow 6" descr="sci-ppt:o006"/>
-          <p:cNvCxnSpPr/>
+              <a:t>Energy</a:t>
+            </a:r>
+          </a:p>
+        </p:txBody>
+      </p:sp>
+      <p:sp>
+        <p:nvSpPr>
+          <p:cNvPr id="6" name="C4-E36 text 4" descr="sci-ppt:o004"/>
+          <p:cNvSpPr txBox="1"/>
           <p:nvPr/>
-        </p:nvCxnSpPr>
+        </p:nvSpPr>
         <p:spPr>
           <a:xfrm>
-            <a:off x="7680960" y="2057400"/>
-            <a:ext cx="640080" cy="0"/>
-          </a:xfrm>
-          <a:prstGeom prst="line">
-            <a:avLst/>
-          </a:prstGeom>
-          <a:ln w="25400">
-            <a:solidFill>
-              <a:srgbClr val="8EDBD4"/>
-            </a:solidFill>
-            <a:headEnd type="none" w="med" len="med"/>
-            <a:tailEnd type="triangle" w="med" len="med"/>
-          </a:ln>
-          <a:effectLst/>
-        </p:spPr>
-      </p:cxnSp>
-      <p:sp>
-        <p:nvSpPr>
-          <p:cNvPr id="9" name="C4-E36 rect 7" descr="sci-ppt:o007"/>
-          <p:cNvSpPr/>
-          <p:nvPr/>
-        </p:nvSpPr>
-        <p:spPr>
-          <a:xfrm>
-            <a:off x="8366760" y="1417320"/>
-            <a:ext cx="3200400" cy="1325880"/>
-          </a:xfrm>
-          <a:prstGeom prst="rect">
-            <a:avLst/>
-          </a:prstGeom>
-          <a:solidFill>
-            <a:srgbClr val="213E4B"/>
-          </a:solidFill>
-          <a:ln w="19050">
-            <a:solidFill>
-              <a:srgbClr val="B4C7D2"/>
-            </a:solidFill>
-          </a:ln>
-          <a:effectLst/>
-        </p:spPr>
-        <p:txBody>
-          <a:bodyPr rtlCol="0" anchor="ctr"/>
-          <a:lstStyle/>
-          <a:p>
-            <a:pPr algn="ctr"/>
-          </a:p>
-        </p:txBody>
-      </p:sp>
-      <p:sp>
-        <p:nvSpPr>
-          <p:cNvPr id="10" name="C4-E36 text 8" descr="sci-ppt:o008"/>
-          <p:cNvSpPr txBox="1"/>
-          <p:nvPr/>
-        </p:nvSpPr>
-        <p:spPr>
-          <a:xfrm>
-            <a:off x="8531352" y="1627632"/>
-            <a:ext cx="2871216" cy="914400"/>
+            <a:off x="594360" y="1920240"/>
+            <a:ext cx="5212080" cy="262636"/>
           </a:xfrm>
           <a:prstGeom prst="rect">
             <a:avLst/>
@@ -3378,7 +3266,7 @@
           <a:effectLst/>
         </p:spPr>
         <p:txBody>
-          <a:bodyPr wrap="square" lIns="27432" rIns="27432" tIns="18288" bIns="18288" anchor="ctr">
+          <a:bodyPr wrap="none" lIns="18288" rIns="18288" tIns="18288" bIns="18288" anchor="t">
             <a:spAutoFit/>
           </a:bodyPr>
           <a:lstStyle/>
@@ -3389,27 +3277,27 @@
               </a:spcAft>
             </a:pPr>
             <a:r>
-              <a:rPr sz="1800" b="0" i="0">
+              <a:rPr sz="1400" b="1" i="0">
                 <a:solidFill>
                   <a:srgbClr val="E7F0F3"/>
                 </a:solidFill>
                 <a:latin typeface="Arial"/>
               </a:rPr>
-              <a:t>Release + departure cost</a:t>
-            </a:r>
-          </a:p>
-        </p:txBody>
-      </p:sp>
-      <p:sp>
-        <p:nvSpPr>
-          <p:cNvPr id="11" name="C4-E36 text 9" descr="sci-ppt:o009"/>
+              <a:t>E_solid ≥ Γ A_f + ½ m_f v_f²</a:t>
+            </a:r>
+          </a:p>
+        </p:txBody>
+      </p:sp>
+      <p:sp>
+        <p:nvSpPr>
+          <p:cNvPr id="7" name="C4-E36 text 5" descr="sci-ppt:o005"/>
           <p:cNvSpPr txBox="1"/>
           <p:nvPr/>
         </p:nvSpPr>
         <p:spPr>
           <a:xfrm>
-            <a:off x="731520" y="3246120"/>
-            <a:ext cx="10789920" cy="457200"/>
+            <a:off x="594360" y="2560320"/>
+            <a:ext cx="5212080" cy="231648"/>
           </a:xfrm>
           <a:prstGeom prst="rect">
             <a:avLst/>
@@ -3418,7 +3306,7 @@
           <a:effectLst/>
         </p:spPr>
         <p:txBody>
-          <a:bodyPr wrap="square" lIns="27432" rIns="27432" tIns="18288" bIns="18288" anchor="ctr">
+          <a:bodyPr wrap="none" lIns="18288" rIns="18288" tIns="18288" bIns="18288" anchor="t">
             <a:spAutoFit/>
           </a:bodyPr>
           <a:lstStyle/>
@@ -3429,49 +3317,59 @@
               </a:spcAft>
             </a:pPr>
             <a:r>
-              <a:rPr sz="1800" b="0" i="0">
+              <a:rPr sz="1200" b="0" i="0">
                 <a:solidFill>
-                  <a:srgbClr val="8EDBD4"/>
+                  <a:srgbClr val="B4C7D2"/>
                 </a:solidFill>
                 <a:latin typeface="Arial"/>
               </a:rPr>
-              <a:t>Work, storage, fracture consumption and net impulse retain separate meanings.</a:t>
-            </a:r>
-          </a:p>
-        </p:txBody>
-      </p:sp>
-      <p:cxnSp>
-        <p:nvCxnSpPr>
-          <p:cNvPr id="12" name="C4-E36 line 10" descr="sci-ppt:o010"/>
-          <p:cNvCxnSpPr/>
+              <a:t>fracture cost + kinetic energy of departure</a:t>
+            </a:r>
+          </a:p>
+        </p:txBody>
+      </p:sp>
+      <p:sp>
+        <p:nvSpPr>
+          <p:cNvPr id="8" name="C4-E36 round_rect 6" descr="sci-ppt:o006"/>
+          <p:cNvSpPr/>
           <p:nvPr/>
-        </p:nvCxnSpPr>
+        </p:nvSpPr>
         <p:spPr>
           <a:xfrm>
-            <a:off x="274320" y="3977639"/>
-            <a:ext cx="11612880" cy="0"/>
+            <a:off x="6217920" y="1371600"/>
+            <a:ext cx="5486400" cy="2103120"/>
           </a:xfrm>
-          <a:prstGeom prst="line">
+          <a:prstGeom prst="roundRect">
             <a:avLst/>
           </a:prstGeom>
-          <a:ln w="12700">
+          <a:solidFill>
+            <a:srgbClr val="213E4B"/>
+          </a:solidFill>
+          <a:ln w="20320">
             <a:solidFill>
-              <a:srgbClr val="405967"/>
+              <a:srgbClr val="F28BA0"/>
             </a:solidFill>
           </a:ln>
           <a:effectLst/>
         </p:spPr>
-      </p:cxnSp>
-      <p:sp>
-        <p:nvSpPr>
-          <p:cNvPr id="13" name="C4-E36 text 11" descr="sci-ppt:o011"/>
+        <p:txBody>
+          <a:bodyPr rtlCol="0" anchor="ctr"/>
+          <a:lstStyle/>
+          <a:p>
+            <a:pPr algn="ctr"/>
+          </a:p>
+        </p:txBody>
+      </p:sp>
+      <p:sp>
+        <p:nvSpPr>
+          <p:cNvPr id="9" name="C4-E36 text 7" descr="sci-ppt:o007"/>
           <p:cNvSpPr txBox="1"/>
           <p:nvPr/>
         </p:nvSpPr>
         <p:spPr>
           <a:xfrm>
-            <a:off x="320040" y="4096512"/>
-            <a:ext cx="5715000" cy="246888"/>
+            <a:off x="6327648" y="1426464"/>
+            <a:ext cx="5266944" cy="254889"/>
           </a:xfrm>
           <a:prstGeom prst="rect">
             <a:avLst/>
@@ -3480,7 +3378,7 @@
           <a:effectLst/>
         </p:spPr>
         <p:txBody>
-          <a:bodyPr wrap="square" lIns="27432" rIns="27432" tIns="18288" bIns="18288" anchor="ctr">
+          <a:bodyPr wrap="none" lIns="18288" rIns="18288" tIns="18288" bIns="18288" anchor="t">
             <a:spAutoFit/>
           </a:bodyPr>
           <a:lstStyle/>
@@ -3491,27 +3389,27 @@
               </a:spcAft>
             </a:pPr>
             <a:r>
-              <a:rPr sz="1150" b="0" i="0">
+              <a:rPr sz="1350" b="1" i="0">
                 <a:solidFill>
-                  <a:srgbClr val="B4C7D2"/>
+                  <a:srgbClr val="F28BA0"/>
                 </a:solidFill>
                 <a:latin typeface="Arial"/>
               </a:rPr>
-              <a:t>• E_solid — available work budget</a:t>
-            </a:r>
-          </a:p>
-        </p:txBody>
-      </p:sp>
-      <p:sp>
-        <p:nvSpPr>
-          <p:cNvPr id="14" name="C4-E36 text 12" descr="sci-ppt:o012"/>
+              <a:t>Momentum</a:t>
+            </a:r>
+          </a:p>
+        </p:txBody>
+      </p:sp>
+      <p:sp>
+        <p:nvSpPr>
+          <p:cNvPr id="10" name="C4-E36 text 8" descr="sci-ppt:o008"/>
           <p:cNvSpPr txBox="1"/>
           <p:nvPr/>
         </p:nvSpPr>
         <p:spPr>
           <a:xfrm>
-            <a:off x="6217920" y="4096512"/>
-            <a:ext cx="5715000" cy="246888"/>
+            <a:off x="6355080" y="1920240"/>
+            <a:ext cx="5212080" cy="262636"/>
           </a:xfrm>
           <a:prstGeom prst="rect">
             <a:avLst/>
@@ -3520,7 +3418,7 @@
           <a:effectLst/>
         </p:spPr>
         <p:txBody>
-          <a:bodyPr wrap="square" lIns="27432" rIns="27432" tIns="18288" bIns="18288" anchor="ctr">
+          <a:bodyPr wrap="none" lIns="18288" rIns="18288" tIns="18288" bIns="18288" anchor="t">
             <a:spAutoFit/>
           </a:bodyPr>
           <a:lstStyle/>
@@ -3531,27 +3429,27 @@
               </a:spcAft>
             </a:pPr>
             <a:r>
-              <a:rPr sz="1150" b="0" i="0">
+              <a:rPr sz="1400" b="1" i="0">
                 <a:solidFill>
-                  <a:srgbClr val="B4C7D2"/>
+                  <a:srgbClr val="E7F0F3"/>
                 </a:solidFill>
                 <a:latin typeface="Arial"/>
               </a:rPr>
-              <a:t>• ΓA_f — release cost</a:t>
-            </a:r>
-          </a:p>
-        </p:txBody>
-      </p:sp>
-      <p:sp>
-        <p:nvSpPr>
-          <p:cNvPr id="15" name="C4-E36 text 13" descr="sci-ppt:o013"/>
+              <a:t>Iₙₑₜ ≥ m_f v_f</a:t>
+            </a:r>
+          </a:p>
+        </p:txBody>
+      </p:sp>
+      <p:sp>
+        <p:nvSpPr>
+          <p:cNvPr id="11" name="C4-E36 text 9" descr="sci-ppt:o009"/>
           <p:cNvSpPr txBox="1"/>
           <p:nvPr/>
         </p:nvSpPr>
         <p:spPr>
           <a:xfrm>
-            <a:off x="320040" y="4329684"/>
-            <a:ext cx="5715000" cy="246888"/>
+            <a:off x="6355080" y="2560320"/>
+            <a:ext cx="5212080" cy="231648"/>
           </a:xfrm>
           <a:prstGeom prst="rect">
             <a:avLst/>
@@ -3560,7 +3458,7 @@
           <a:effectLst/>
         </p:spPr>
         <p:txBody>
-          <a:bodyPr wrap="square" lIns="27432" rIns="27432" tIns="18288" bIns="18288" anchor="ctr">
+          <a:bodyPr wrap="none" lIns="18288" rIns="18288" tIns="18288" bIns="18288" anchor="t">
             <a:spAutoFit/>
           </a:bodyPr>
           <a:lstStyle/>
@@ -3571,27 +3469,27 @@
               </a:spcAft>
             </a:pPr>
             <a:r>
-              <a:rPr sz="1150" b="0" i="0">
+              <a:rPr sz="1200" b="0" i="0">
                 <a:solidFill>
                   <a:srgbClr val="B4C7D2"/>
                 </a:solidFill>
                 <a:latin typeface="Arial"/>
               </a:rPr>
-              <a:t>• m_f, v_f — finite payload translation</a:t>
-            </a:r>
-          </a:p>
-        </p:txBody>
-      </p:sp>
-      <p:sp>
-        <p:nvSpPr>
-          <p:cNvPr id="16" name="C4-E36 text 14" descr="sci-ppt:o014"/>
+              <a:t>net impulse must carry the film at v_f</a:t>
+            </a:r>
+          </a:p>
+        </p:txBody>
+      </p:sp>
+      <p:sp>
+        <p:nvSpPr>
+          <p:cNvPr id="12" name="C4-E36 text 10" descr="sci-ppt:o010"/>
           <p:cNvSpPr txBox="1"/>
           <p:nvPr/>
         </p:nvSpPr>
         <p:spPr>
           <a:xfrm>
-            <a:off x="6217920" y="4329684"/>
-            <a:ext cx="5715000" cy="246888"/>
+            <a:off x="457200" y="3858768"/>
+            <a:ext cx="5760720" cy="231648"/>
           </a:xfrm>
           <a:prstGeom prst="rect">
             <a:avLst/>
@@ -3600,7 +3498,7 @@
           <a:effectLst/>
         </p:spPr>
         <p:txBody>
-          <a:bodyPr wrap="square" lIns="27432" rIns="27432" tIns="18288" bIns="18288" anchor="ctr">
+          <a:bodyPr wrap="none" lIns="18288" rIns="18288" tIns="18288" bIns="18288" anchor="t">
             <a:spAutoFit/>
           </a:bodyPr>
           <a:lstStyle/>
@@ -3611,27 +3509,63 @@
               </a:spcAft>
             </a:pPr>
             <a:r>
-              <a:rPr sz="1150" b="0" i="0">
+              <a:rPr sz="1200" b="0" i="0">
                 <a:solidFill>
-                  <a:srgbClr val="B4C7D2"/>
+                  <a:srgbClr val="E7F0F3"/>
                 </a:solidFill>
                 <a:latin typeface="Arial"/>
               </a:rPr>
-              <a:t>• I_net — actual net impulse</a:t>
-            </a:r>
-          </a:p>
-        </p:txBody>
-      </p:sp>
-      <p:sp>
-        <p:nvSpPr>
-          <p:cNvPr id="17" name="C4-E36 text 15" descr="sci-ppt:o015"/>
+              <a:t>E_solid 10.0 nJ vs Γ A_f 5.0 nJ (passes)</a:t>
+            </a:r>
+          </a:p>
+        </p:txBody>
+      </p:sp>
+      <p:sp>
+        <p:nvSpPr>
+          <p:cNvPr id="13" name="C4-E36 rect 11" descr="sci-ppt:o011"/>
+          <p:cNvSpPr/>
+          <p:nvPr/>
+        </p:nvSpPr>
+        <p:spPr>
+          <a:xfrm>
+            <a:off x="6309360" y="3840480"/>
+            <a:ext cx="4114800" cy="365760"/>
+          </a:xfrm>
+          <a:prstGeom prst="rect">
+            <a:avLst/>
+          </a:prstGeom>
+          <a:solidFill>
+            <a:srgbClr val="8EDBD4">
+              <a:alpha val="85000"/>
+            </a:srgbClr>
+          </a:solidFill>
+          <a:ln w="12700">
+            <a:solidFill>
+              <a:srgbClr val="8EDBD4">
+                <a:alpha val="85000"/>
+              </a:srgbClr>
+            </a:solidFill>
+          </a:ln>
+          <a:effectLst/>
+        </p:spPr>
+        <p:txBody>
+          <a:bodyPr rtlCol="0" anchor="ctr"/>
+          <a:lstStyle/>
+          <a:p>
+            <a:pPr algn="ctr"/>
+          </a:p>
+        </p:txBody>
+      </p:sp>
+      <p:sp>
+        <p:nvSpPr>
+          <p:cNvPr id="14" name="C4-E36 text 12" descr="sci-ppt:o012"/>
           <p:cNvSpPr txBox="1"/>
           <p:nvPr/>
         </p:nvSpPr>
         <p:spPr>
           <a:xfrm>
-            <a:off x="320040" y="5596128"/>
-            <a:ext cx="11430000" cy="292608"/>
+            <a:off x="10497312" y="3886200"/>
+            <a:ext cx="1371600" cy="231648"/>
           </a:xfrm>
           <a:prstGeom prst="rect">
             <a:avLst/>
@@ -3640,7 +3574,7 @@
           <a:effectLst/>
         </p:spPr>
         <p:txBody>
-          <a:bodyPr wrap="square" lIns="27432" rIns="27432" tIns="18288" bIns="18288" anchor="ctr">
+          <a:bodyPr wrap="none" lIns="18288" rIns="18288" tIns="18288" bIns="18288" anchor="t">
             <a:spAutoFit/>
           </a:bodyPr>
           <a:lstStyle/>
@@ -3651,27 +3585,27 @@
               </a:spcAft>
             </a:pPr>
             <a:r>
-              <a:rPr sz="1150" b="0" i="0">
+              <a:rPr sz="1200" b="1" i="0">
                 <a:solidFill>
-                  <a:srgbClr val="8EDBD4"/>
+                  <a:srgbClr val="E7F0F3"/>
                 </a:solidFill>
                 <a:latin typeface="Arial"/>
               </a:rPr>
-              <a:t>Peak pressure supplies neither the area nor the energy budget.</a:t>
-            </a:r>
-          </a:p>
-        </p:txBody>
-      </p:sp>
-      <p:sp>
-        <p:nvSpPr>
-          <p:cNvPr id="18" name="C4-E36 text 16" descr="sci-ppt:o016"/>
+              <a:t>1.00 of need</a:t>
+            </a:r>
+          </a:p>
+        </p:txBody>
+      </p:sp>
+      <p:sp>
+        <p:nvSpPr>
+          <p:cNvPr id="15" name="C4-E36 text 13" descr="sci-ppt:o013"/>
           <p:cNvSpPr txBox="1"/>
           <p:nvPr/>
         </p:nvSpPr>
         <p:spPr>
           <a:xfrm>
-            <a:off x="320040" y="6473952"/>
-            <a:ext cx="11430000" cy="256032"/>
+            <a:off x="457200" y="4453128"/>
+            <a:ext cx="5760720" cy="231648"/>
           </a:xfrm>
           <a:prstGeom prst="rect">
             <a:avLst/>
@@ -3680,7 +3614,163 @@
           <a:effectLst/>
         </p:spPr>
         <p:txBody>
-          <a:bodyPr wrap="square" lIns="27432" rIns="27432" tIns="18288" bIns="18288" anchor="ctr">
+          <a:bodyPr wrap="none" lIns="18288" rIns="18288" tIns="18288" bIns="18288" anchor="t">
+            <a:spAutoFit/>
+          </a:bodyPr>
+          <a:lstStyle/>
+          <a:p>
+            <a:pPr algn="l">
+              <a:spcAft>
+                <a:spcPts val="0"/>
+              </a:spcAft>
+            </a:pPr>
+            <a:r>
+              <a:rPr sz="1200" b="0" i="0">
+                <a:solidFill>
+                  <a:srgbClr val="E7F0F3"/>
+                </a:solidFill>
+                <a:latin typeface="Arial"/>
+              </a:rPr>
+              <a:t>E_solid 10.0 nJ vs Γ A_f 20.0 nJ (fails)</a:t>
+            </a:r>
+          </a:p>
+        </p:txBody>
+      </p:sp>
+      <p:sp>
+        <p:nvSpPr>
+          <p:cNvPr id="16" name="C4-E36 rect 14" descr="sci-ppt:o014"/>
+          <p:cNvSpPr/>
+          <p:nvPr/>
+        </p:nvSpPr>
+        <p:spPr>
+          <a:xfrm>
+            <a:off x="6309360" y="4434840"/>
+            <a:ext cx="2057400" cy="365760"/>
+          </a:xfrm>
+          <a:prstGeom prst="rect">
+            <a:avLst/>
+          </a:prstGeom>
+          <a:solidFill>
+            <a:srgbClr val="F28BA0">
+              <a:alpha val="85000"/>
+            </a:srgbClr>
+          </a:solidFill>
+          <a:ln w="12700">
+            <a:solidFill>
+              <a:srgbClr val="F28BA0">
+                <a:alpha val="85000"/>
+              </a:srgbClr>
+            </a:solidFill>
+          </a:ln>
+          <a:effectLst/>
+        </p:spPr>
+        <p:txBody>
+          <a:bodyPr rtlCol="0" anchor="ctr"/>
+          <a:lstStyle/>
+          <a:p>
+            <a:pPr algn="ctr"/>
+          </a:p>
+        </p:txBody>
+      </p:sp>
+      <p:sp>
+        <p:nvSpPr>
+          <p:cNvPr id="17" name="C4-E36 text 15" descr="sci-ppt:o015"/>
+          <p:cNvSpPr txBox="1"/>
+          <p:nvPr/>
+        </p:nvSpPr>
+        <p:spPr>
+          <a:xfrm>
+            <a:off x="8439912" y="4480560"/>
+            <a:ext cx="1371600" cy="231648"/>
+          </a:xfrm>
+          <a:prstGeom prst="rect">
+            <a:avLst/>
+          </a:prstGeom>
+          <a:noFill/>
+          <a:effectLst/>
+        </p:spPr>
+        <p:txBody>
+          <a:bodyPr wrap="none" lIns="18288" rIns="18288" tIns="18288" bIns="18288" anchor="t">
+            <a:spAutoFit/>
+          </a:bodyPr>
+          <a:lstStyle/>
+          <a:p>
+            <a:pPr algn="l">
+              <a:spcAft>
+                <a:spcPts val="0"/>
+              </a:spcAft>
+            </a:pPr>
+            <a:r>
+              <a:rPr sz="1200" b="1" i="0">
+                <a:solidFill>
+                  <a:srgbClr val="E7F0F3"/>
+                </a:solidFill>
+                <a:latin typeface="Arial"/>
+              </a:rPr>
+              <a:t>0.50 of need</a:t>
+            </a:r>
+          </a:p>
+        </p:txBody>
+      </p:sp>
+      <p:sp>
+        <p:nvSpPr>
+          <p:cNvPr id="18" name="C4-E36 text 16" descr="sci-ppt:o016"/>
+          <p:cNvSpPr txBox="1"/>
+          <p:nvPr/>
+        </p:nvSpPr>
+        <p:spPr>
+          <a:xfrm>
+            <a:off x="457200" y="5212080"/>
+            <a:ext cx="11247120" cy="239395"/>
+          </a:xfrm>
+          <a:prstGeom prst="rect">
+            <a:avLst/>
+          </a:prstGeom>
+          <a:noFill/>
+          <a:effectLst/>
+        </p:spPr>
+        <p:txBody>
+          <a:bodyPr wrap="none" lIns="18288" rIns="18288" tIns="18288" bIns="18288" anchor="t">
+            <a:spAutoFit/>
+          </a:bodyPr>
+          <a:lstStyle/>
+          <a:p>
+            <a:pPr algn="l">
+              <a:spcAft>
+                <a:spcPts val="0"/>
+              </a:spcAft>
+            </a:pPr>
+            <a:r>
+              <a:rPr sz="1250" b="0" i="0">
+                <a:solidFill>
+                  <a:srgbClr val="F2B880"/>
+                </a:solidFill>
+                <a:latin typeface="Arial"/>
+              </a:rPr>
+              <a:t>Both screens must pass for the same Γ, A_f, m_f and v_f; the 20 nJ case already fails the first.</a:t>
+            </a:r>
+          </a:p>
+        </p:txBody>
+      </p:sp>
+      <p:sp>
+        <p:nvSpPr>
+          <p:cNvPr id="19" name="C4-E36 text 17" descr="sci-ppt:o017"/>
+          <p:cNvSpPr txBox="1"/>
+          <p:nvPr/>
+        </p:nvSpPr>
+        <p:spPr>
+          <a:xfrm>
+            <a:off x="320040" y="6510528"/>
+            <a:ext cx="11521440" cy="200660"/>
+          </a:xfrm>
+          <a:prstGeom prst="rect">
+            <a:avLst/>
+          </a:prstGeom>
+          <a:noFill/>
+          <a:effectLst/>
+        </p:spPr>
+        <p:txBody>
+          <a:bodyPr wrap="none" lIns="18288" rIns="18288" tIns="18288" bIns="18288" anchor="t">
             <a:spAutoFit/>
           </a:bodyPr>
           <a:lstStyle/>
@@ -3697,7 +3787,7 @@
                 </a:solidFill>
                 <a:latin typeface="Arial"/>
               </a:rPr>
-              <a:t>Model schematic; geometry is not to scale.</a:t>
+              <a:t>Reference formulas of the Defence 1 answer: Eqs. C4-E30 to E33 (bar = budget / need, capped at 1).</a:t>
             </a:r>
           </a:p>
         </p:txBody>
